--- a/ClassMaterials/IntroToGraphics/Slides/Graphics.pptx
+++ b/ClassMaterials/IntroToGraphics/Slides/Graphics.pptx
@@ -5248,7 +5248,7 @@
               <a:pPr>
                 <a:defRPr/>
               </a:pPr>
-              <a:t>Tuesday, April 22, 2025</a:t>
+              <a:t>Monday, September 28, 2026</a:t>
             </a:fld>
             <a:endParaRPr lang="en-US" dirty="0"/>
           </a:p>
@@ -10339,120 +10339,6 @@
               <a:t>PracticeIntroToJavaGraphicsSolution</a:t>
             </a:r>
             <a:endParaRPr lang="en-US" sz="2400" i="1" dirty="0"/>
-          </a:p>
-          <a:p>
-            <a:r>
-              <a:rPr lang="en-US" sz="2400" dirty="0">
-                <a:solidFill>
-                  <a:srgbClr val="FFFFFF"/>
-                </a:solidFill>
-              </a:rPr>
-              <a:t>The Quiz for today is:</a:t>
-            </a:r>
-          </a:p>
-          <a:p>
-            <a:pPr marL="342900" indent="-342900">
-              <a:buFont typeface="Arial" panose="020B0604020202020204" pitchFamily="34" charset="0"/>
-              <a:buChar char="•"/>
-            </a:pPr>
-            <a:r>
-              <a:rPr lang="en-US" sz="2400" i="1" dirty="0" err="1"/>
-              <a:t>GraphicsQuiz</a:t>
-            </a:r>
-            <a:endParaRPr lang="en-US" sz="2400" i="1" dirty="0"/>
-          </a:p>
-        </p:txBody>
-      </p:sp>
-      <p:pic>
-        <p:nvPicPr>
-          <p:cNvPr id="3" name="Picture 2">
-            <a:extLst>
-              <a:ext uri="{FF2B5EF4-FFF2-40B4-BE49-F238E27FC236}">
-                <a16:creationId xmlns:a16="http://schemas.microsoft.com/office/drawing/2014/main" id="{A45AB32E-CCFF-47DA-FB67-AFE3A0ABBA86}"/>
-              </a:ext>
-            </a:extLst>
-          </p:cNvPr>
-          <p:cNvPicPr>
-            <a:picLocks noChangeAspect="1"/>
-          </p:cNvPicPr>
-          <p:nvPr/>
-        </p:nvPicPr>
-        <p:blipFill>
-          <a:blip r:embed="rId3"/>
-          <a:stretch>
-            <a:fillRect/>
-          </a:stretch>
-        </p:blipFill>
-        <p:spPr>
-          <a:xfrm>
-            <a:off x="6155301" y="1199054"/>
-            <a:ext cx="2683719" cy="2324076"/>
-          </a:xfrm>
-          <a:prstGeom prst="rect">
-            <a:avLst/>
-          </a:prstGeom>
-        </p:spPr>
-      </p:pic>
-      <p:sp>
-        <p:nvSpPr>
-          <p:cNvPr id="4" name="Shape 54">
-            <a:extLst>
-              <a:ext uri="{FF2B5EF4-FFF2-40B4-BE49-F238E27FC236}">
-                <a16:creationId xmlns:a16="http://schemas.microsoft.com/office/drawing/2014/main" id="{EE8B0DC1-5186-A91F-55CB-5FE97CCB24E0}"/>
-              </a:ext>
-            </a:extLst>
-          </p:cNvPr>
-          <p:cNvSpPr/>
-          <p:nvPr/>
-        </p:nvSpPr>
-        <p:spPr>
-          <a:xfrm>
-            <a:off x="5539154" y="209686"/>
-            <a:ext cx="3346430" cy="738664"/>
-          </a:xfrm>
-          <a:prstGeom prst="rect">
-            <a:avLst/>
-          </a:prstGeom>
-          <a:solidFill>
-            <a:srgbClr val="9BBB59"/>
-          </a:solidFill>
-          <a:ln w="25400" cap="rnd">
-            <a:solidFill>
-              <a:srgbClr val="718841"/>
-            </a:solidFill>
-          </a:ln>
-          <a:extLst>
-            <a:ext uri="{C572A759-6A51-4108-AA02-DFA0A04FC94B}">
-              <ma14:wrappingTextBoxFlag xmlns="" xmlns:ma14="http://schemas.microsoft.com/office/mac/drawingml/2011/main" val="1"/>
-            </a:ext>
-          </a:extLst>
-        </p:spPr>
-        <p:txBody>
-          <a:bodyPr wrap="square" lIns="0" tIns="0" rIns="0" bIns="0">
-            <a:spAutoFit/>
-          </a:bodyPr>
-          <a:lstStyle/>
-          <a:p>
-            <a:pPr lvl="0"/>
-            <a:r>
-              <a:rPr lang="en-US" sz="2400" i="1" dirty="0">
-                <a:solidFill>
-                  <a:srgbClr val="FFFFFF"/>
-                </a:solidFill>
-              </a:rPr>
-              <a:t> Attendance password    </a:t>
-            </a:r>
-          </a:p>
-          <a:p>
-            <a:pPr lvl="0"/>
-            <a:r>
-              <a:rPr lang="en-US" sz="2400" i="1" dirty="0">
-                <a:solidFill>
-                  <a:srgbClr val="FFFFFF"/>
-                </a:solidFill>
-              </a:rPr>
-              <a:t> is written on the board</a:t>
-            </a:r>
           </a:p>
         </p:txBody>
       </p:sp>
@@ -14618,7 +14504,7 @@
               </a:lnSpc>
             </a:pPr>
             <a:r>
-              <a:rPr lang="en-US" sz="4000" b="1" strike="noStrike" cap="all" spc="-1">
+              <a:rPr lang="en-US" sz="4000" b="1" spc="-1" dirty="0" err="1">
                 <a:solidFill>
                   <a:srgbClr val="000000"/>
                 </a:solidFill>
@@ -14629,9 +14515,23 @@
                 </a:uFill>
                 <a:latin typeface="Calibri"/>
               </a:rPr>
-              <a:t>Scene Introduction</a:t>
-            </a:r>
-            <a:endParaRPr lang="en-US" sz="4400" b="0" strike="noStrike" spc="-1">
+              <a:t>HWFoxAndHound</a:t>
+            </a:r>
+            <a:r>
+              <a:rPr lang="en-US" sz="4000" b="1" strike="noStrike" spc="-1" dirty="0">
+                <a:solidFill>
+                  <a:srgbClr val="000000"/>
+                </a:solidFill>
+                <a:uFill>
+                  <a:solidFill>
+                    <a:srgbClr val="FFFFFF"/>
+                  </a:solidFill>
+                </a:uFill>
+                <a:latin typeface="Calibri"/>
+              </a:rPr>
+              <a:t> Introduction</a:t>
+            </a:r>
+            <a:endParaRPr lang="en-US" sz="4400" b="0" strike="noStrike" spc="-1" dirty="0">
               <a:solidFill>
                 <a:srgbClr val="000000"/>
               </a:solidFill>
@@ -14674,7 +14574,7 @@
               </a:lnSpc>
             </a:pPr>
             <a:r>
-              <a:rPr lang="en-US" sz="2000" b="1" strike="noStrike" spc="-1">
+              <a:rPr lang="en-US" sz="2000" b="1" strike="noStrike" spc="-1" dirty="0" err="1">
                 <a:solidFill>
                   <a:srgbClr val="8B8B8B"/>
                 </a:solidFill>
@@ -14685,9 +14585,23 @@
                 </a:uFill>
                 <a:latin typeface="Calibri"/>
               </a:rPr>
-              <a:t>Scene project</a:t>
-            </a:r>
-            <a:endParaRPr lang="en-US" sz="3200" b="0" strike="noStrike" spc="-1">
+              <a:t>HWFoxAndHound</a:t>
+            </a:r>
+            <a:r>
+              <a:rPr lang="en-US" sz="2000" b="1" strike="noStrike" spc="-1" dirty="0">
+                <a:solidFill>
+                  <a:srgbClr val="8B8B8B"/>
+                </a:solidFill>
+                <a:uFill>
+                  <a:solidFill>
+                    <a:srgbClr val="FFFFFF"/>
+                  </a:solidFill>
+                </a:uFill>
+                <a:latin typeface="Calibri"/>
+              </a:rPr>
+              <a:t> project</a:t>
+            </a:r>
+            <a:endParaRPr lang="en-US" sz="3200" b="0" strike="noStrike" spc="-1" dirty="0">
               <a:solidFill>
                 <a:srgbClr val="000000"/>
               </a:solidFill>
@@ -15046,13 +14960,13 @@
           <p:nvPr/>
         </p:nvPicPr>
         <p:blipFill>
-          <a:blip r:embed="rId2">
+          <a:blip>
             <a:extLst>
               <a:ext uri="{28A0092B-C50C-407E-A947-70E740481C1C}">
                 <a14:useLocalDpi xmlns:a14="http://schemas.microsoft.com/office/drawing/2010/main" val="0"/>
               </a:ext>
               <a:ext uri="{96DAC541-7B7A-43D3-8B79-37D633B846F1}">
-                <asvg:svgBlip xmlns:asvg="http://schemas.microsoft.com/office/drawing/2016/SVG/main" r:embed="rId3"/>
+                <asvg:svgBlip xmlns:asvg="http://schemas.microsoft.com/office/drawing/2016/SVG/main" r:embed="rId2"/>
               </a:ext>
             </a:extLst>
           </a:blip>
@@ -15085,7 +14999,7 @@
           <p:nvPr/>
         </p:nvPicPr>
         <p:blipFill>
-          <a:blip r:embed="rId4"/>
+          <a:blip r:embed="rId3"/>
           <a:stretch>
             <a:fillRect/>
           </a:stretch>
@@ -15114,7 +15028,7 @@
 </file>
 
 <file path=ppt/slides/slide2.xml><?xml version="1.0" encoding="utf-8"?>
-<p:sld xmlns:a="http://schemas.openxmlformats.org/drawingml/2006/main" xmlns:r="http://schemas.openxmlformats.org/officeDocument/2006/relationships" xmlns:p="http://schemas.openxmlformats.org/presentationml/2006/main">
+<p:sld xmlns:a="http://schemas.openxmlformats.org/drawingml/2006/main" xmlns:r="http://schemas.openxmlformats.org/officeDocument/2006/relationships" xmlns:p="http://schemas.openxmlformats.org/presentationml/2006/main" show="0">
   <p:cSld>
     <p:spTree>
       <p:nvGrpSpPr>
@@ -17435,13 +17349,13 @@
           <p:nvPr/>
         </p:nvPicPr>
         <p:blipFill>
-          <a:blip r:embed="rId3">
+          <a:blip>
             <a:extLst>
               <a:ext uri="{28A0092B-C50C-407E-A947-70E740481C1C}">
                 <a14:useLocalDpi xmlns:a14="http://schemas.microsoft.com/office/drawing/2010/main" val="0"/>
               </a:ext>
               <a:ext uri="{96DAC541-7B7A-43D3-8B79-37D633B846F1}">
-                <asvg:svgBlip xmlns:asvg="http://schemas.microsoft.com/office/drawing/2016/SVG/main" r:embed="rId4"/>
+                <asvg:svgBlip xmlns:asvg="http://schemas.microsoft.com/office/drawing/2016/SVG/main" r:embed="rId3"/>
               </a:ext>
             </a:extLst>
           </a:blip>
